--- a/project.pptx
+++ b/project.pptx
@@ -5,7 +5,11 @@
     <p:sldMasterId id="2147483648" r:id="rId1"/>
   </p:sldMasterIdLst>
   <p:sldIdLst>
-    <p:sldId id="256" r:id="rId2"/>
+    <p:sldId id="260" r:id="rId2"/>
+    <p:sldId id="259" r:id="rId3"/>
+    <p:sldId id="257" r:id="rId4"/>
+    <p:sldId id="256" r:id="rId5"/>
+    <p:sldId id="258" r:id="rId6"/>
   </p:sldIdLst>
   <p:sldSz cx="12192000" cy="6858000"/>
   <p:notesSz cx="6858000" cy="9144000"/>
@@ -104,6 +108,11 @@
       </a:defRPr>
     </a:lvl9pPr>
   </p:defaultTextStyle>
+  <p:extLst>
+    <p:ext uri="{EFAFB233-063F-42B5-8137-9DF3F51BA10A}">
+      <p15:sldGuideLst xmlns:p15="http://schemas.microsoft.com/office/powerpoint/2012/main"/>
+    </p:ext>
+  </p:extLst>
 </p:presentation>
 </file>
 
@@ -238,7 +247,7 @@
           <a:p>
             <a:fld id="{FB1F492C-5E29-453F-B14D-6214D919D720}" type="datetimeFigureOut">
               <a:rPr lang="ko-KR" altLang="en-US" smtClean="0"/>
-              <a:t>2024-08-07</a:t>
+              <a:t>2024-08-09</a:t>
             </a:fld>
             <a:endParaRPr lang="ko-KR" altLang="en-US"/>
           </a:p>
@@ -408,7 +417,7 @@
           <a:p>
             <a:fld id="{FB1F492C-5E29-453F-B14D-6214D919D720}" type="datetimeFigureOut">
               <a:rPr lang="ko-KR" altLang="en-US" smtClean="0"/>
-              <a:t>2024-08-07</a:t>
+              <a:t>2024-08-09</a:t>
             </a:fld>
             <a:endParaRPr lang="ko-KR" altLang="en-US"/>
           </a:p>
@@ -588,7 +597,7 @@
           <a:p>
             <a:fld id="{FB1F492C-5E29-453F-B14D-6214D919D720}" type="datetimeFigureOut">
               <a:rPr lang="ko-KR" altLang="en-US" smtClean="0"/>
-              <a:t>2024-08-07</a:t>
+              <a:t>2024-08-09</a:t>
             </a:fld>
             <a:endParaRPr lang="ko-KR" altLang="en-US"/>
           </a:p>
@@ -758,7 +767,7 @@
           <a:p>
             <a:fld id="{FB1F492C-5E29-453F-B14D-6214D919D720}" type="datetimeFigureOut">
               <a:rPr lang="ko-KR" altLang="en-US" smtClean="0"/>
-              <a:t>2024-08-07</a:t>
+              <a:t>2024-08-09</a:t>
             </a:fld>
             <a:endParaRPr lang="ko-KR" altLang="en-US"/>
           </a:p>
@@ -1004,7 +1013,7 @@
           <a:p>
             <a:fld id="{FB1F492C-5E29-453F-B14D-6214D919D720}" type="datetimeFigureOut">
               <a:rPr lang="ko-KR" altLang="en-US" smtClean="0"/>
-              <a:t>2024-08-07</a:t>
+              <a:t>2024-08-09</a:t>
             </a:fld>
             <a:endParaRPr lang="ko-KR" altLang="en-US"/>
           </a:p>
@@ -1236,7 +1245,7 @@
           <a:p>
             <a:fld id="{FB1F492C-5E29-453F-B14D-6214D919D720}" type="datetimeFigureOut">
               <a:rPr lang="ko-KR" altLang="en-US" smtClean="0"/>
-              <a:t>2024-08-07</a:t>
+              <a:t>2024-08-09</a:t>
             </a:fld>
             <a:endParaRPr lang="ko-KR" altLang="en-US"/>
           </a:p>
@@ -1603,7 +1612,7 @@
           <a:p>
             <a:fld id="{FB1F492C-5E29-453F-B14D-6214D919D720}" type="datetimeFigureOut">
               <a:rPr lang="ko-KR" altLang="en-US" smtClean="0"/>
-              <a:t>2024-08-07</a:t>
+              <a:t>2024-08-09</a:t>
             </a:fld>
             <a:endParaRPr lang="ko-KR" altLang="en-US"/>
           </a:p>
@@ -1721,7 +1730,7 @@
           <a:p>
             <a:fld id="{FB1F492C-5E29-453F-B14D-6214D919D720}" type="datetimeFigureOut">
               <a:rPr lang="ko-KR" altLang="en-US" smtClean="0"/>
-              <a:t>2024-08-07</a:t>
+              <a:t>2024-08-09</a:t>
             </a:fld>
             <a:endParaRPr lang="ko-KR" altLang="en-US"/>
           </a:p>
@@ -1816,7 +1825,7 @@
           <a:p>
             <a:fld id="{FB1F492C-5E29-453F-B14D-6214D919D720}" type="datetimeFigureOut">
               <a:rPr lang="ko-KR" altLang="en-US" smtClean="0"/>
-              <a:t>2024-08-07</a:t>
+              <a:t>2024-08-09</a:t>
             </a:fld>
             <a:endParaRPr lang="ko-KR" altLang="en-US"/>
           </a:p>
@@ -2093,7 +2102,7 @@
           <a:p>
             <a:fld id="{FB1F492C-5E29-453F-B14D-6214D919D720}" type="datetimeFigureOut">
               <a:rPr lang="ko-KR" altLang="en-US" smtClean="0"/>
-              <a:t>2024-08-07</a:t>
+              <a:t>2024-08-09</a:t>
             </a:fld>
             <a:endParaRPr lang="ko-KR" altLang="en-US"/>
           </a:p>
@@ -2346,7 +2355,7 @@
           <a:p>
             <a:fld id="{FB1F492C-5E29-453F-B14D-6214D919D720}" type="datetimeFigureOut">
               <a:rPr lang="ko-KR" altLang="en-US" smtClean="0"/>
-              <a:t>2024-08-07</a:t>
+              <a:t>2024-08-09</a:t>
             </a:fld>
             <a:endParaRPr lang="ko-KR" altLang="en-US"/>
           </a:p>
@@ -2559,7 +2568,7 @@
           <a:p>
             <a:fld id="{FB1F492C-5E29-453F-B14D-6214D919D720}" type="datetimeFigureOut">
               <a:rPr lang="ko-KR" altLang="en-US" smtClean="0"/>
-              <a:t>2024-08-07</a:t>
+              <a:t>2024-08-09</a:t>
             </a:fld>
             <a:endParaRPr lang="ko-KR" altLang="en-US"/>
           </a:p>
@@ -2964,21 +2973,402 @@
           <a:chExt cx="0" cy="0"/>
         </a:xfrm>
       </p:grpSpPr>
-      <p:sp>
-        <p:nvSpPr>
-          <p:cNvPr id="5" name="직사각형 4"/>
-          <p:cNvSpPr/>
+    </p:spTree>
+    <p:extLst>
+      <p:ext uri="{BB962C8B-B14F-4D97-AF65-F5344CB8AC3E}">
+        <p14:creationId xmlns:p14="http://schemas.microsoft.com/office/powerpoint/2010/main" val="2455295685"/>
+      </p:ext>
+    </p:extLst>
+  </p:cSld>
+  <p:clrMapOvr>
+    <a:masterClrMapping/>
+  </p:clrMapOvr>
+</p:sld>
+</file>
+
+<file path=ppt/slides/slide2.xml><?xml version="1.0" encoding="utf-8"?>
+<p:sld xmlns:a="http://schemas.openxmlformats.org/drawingml/2006/main" xmlns:r="http://schemas.openxmlformats.org/officeDocument/2006/relationships" xmlns:p="http://schemas.openxmlformats.org/presentationml/2006/main">
+  <p:cSld>
+    <p:spTree>
+      <p:nvGrpSpPr>
+        <p:cNvPr id="1" name=""/>
+        <p:cNvGrpSpPr/>
+        <p:nvPr/>
+      </p:nvGrpSpPr>
+      <p:grpSpPr>
+        <a:xfrm>
+          <a:off x="0" y="0"/>
+          <a:ext cx="0" cy="0"/>
+          <a:chOff x="0" y="0"/>
+          <a:chExt cx="0" cy="0"/>
+        </a:xfrm>
+      </p:grpSpPr>
+      <p:pic>
+        <p:nvPicPr>
+          <p:cNvPr id="4" name="그림 3"/>
+          <p:cNvPicPr>
+            <a:picLocks noChangeAspect="1"/>
+          </p:cNvPicPr>
           <p:nvPr/>
-        </p:nvSpPr>
+        </p:nvPicPr>
+        <p:blipFill>
+          <a:blip r:embed="rId2">
+            <a:extLst>
+              <a:ext uri="{28A0092B-C50C-407E-A947-70E740481C1C}">
+                <a14:useLocalDpi xmlns:a14="http://schemas.microsoft.com/office/drawing/2010/main" val="0"/>
+              </a:ext>
+            </a:extLst>
+          </a:blip>
+          <a:stretch>
+            <a:fillRect/>
+          </a:stretch>
+        </p:blipFill>
         <p:spPr>
           <a:xfrm>
-            <a:off x="3048000" y="474345"/>
-            <a:ext cx="6096000" cy="5909310"/>
+            <a:off x="614366" y="509800"/>
+            <a:ext cx="4029884" cy="2428133"/>
           </a:xfrm>
           <a:prstGeom prst="rect">
             <a:avLst/>
           </a:prstGeom>
         </p:spPr>
+      </p:pic>
+      <p:sp>
+        <p:nvSpPr>
+          <p:cNvPr id="5" name="TextBox 4"/>
+          <p:cNvSpPr txBox="1"/>
+          <p:nvPr/>
+        </p:nvSpPr>
+        <p:spPr>
+          <a:xfrm>
+            <a:off x="6668348" y="1131148"/>
+            <a:ext cx="4279052" cy="1200329"/>
+          </a:xfrm>
+          <a:prstGeom prst="rect">
+            <a:avLst/>
+          </a:prstGeom>
+          <a:noFill/>
+        </p:spPr>
+        <p:txBody>
+          <a:bodyPr wrap="square" rtlCol="0">
+            <a:spAutoFit/>
+          </a:bodyPr>
+          <a:lstStyle/>
+          <a:p>
+            <a:r>
+              <a:rPr lang="ko-KR" altLang="en-US" dirty="0" smtClean="0"/>
+              <a:t>문제</a:t>
+            </a:r>
+            <a:endParaRPr lang="en-US" altLang="ko-KR" dirty="0" smtClean="0"/>
+          </a:p>
+          <a:p>
+            <a:r>
+              <a:rPr lang="ko-KR" altLang="en-US" dirty="0" smtClean="0"/>
+              <a:t>회원의 </a:t>
+            </a:r>
+            <a:r>
+              <a:rPr lang="en-US" altLang="ko-KR" dirty="0" smtClean="0"/>
+              <a:t>ID</a:t>
+            </a:r>
+            <a:r>
+              <a:rPr lang="ko-KR" altLang="en-US" dirty="0" smtClean="0"/>
+              <a:t>를 </a:t>
+            </a:r>
+            <a:r>
+              <a:rPr lang="en-US" altLang="ko-KR" dirty="0" smtClean="0"/>
+              <a:t>DB</a:t>
+            </a:r>
+            <a:r>
+              <a:rPr lang="ko-KR" altLang="en-US" dirty="0" smtClean="0"/>
+              <a:t>에 추가하고 싶었는데 </a:t>
+            </a:r>
+            <a:r>
+              <a:rPr lang="en-US" altLang="ko-KR" dirty="0" smtClean="0"/>
+              <a:t>ID</a:t>
+            </a:r>
+            <a:r>
+              <a:rPr lang="ko-KR" altLang="en-US" dirty="0" smtClean="0"/>
+              <a:t>의 값을 </a:t>
+            </a:r>
+            <a:r>
+              <a:rPr lang="en-US" altLang="ko-KR" dirty="0" smtClean="0"/>
+              <a:t>Controller</a:t>
+            </a:r>
+            <a:r>
+              <a:rPr lang="ko-KR" altLang="en-US" dirty="0" smtClean="0"/>
+              <a:t>에서 </a:t>
+            </a:r>
+            <a:r>
+              <a:rPr lang="en-US" altLang="ko-KR" dirty="0" smtClean="0"/>
+              <a:t>ID</a:t>
+            </a:r>
+            <a:r>
+              <a:rPr lang="ko-KR" altLang="en-US" dirty="0" smtClean="0"/>
+              <a:t>값을 </a:t>
+            </a:r>
+            <a:r>
+              <a:rPr lang="ko-KR" altLang="en-US" dirty="0" err="1" smtClean="0"/>
+              <a:t>못가져옴</a:t>
+            </a:r>
+            <a:endParaRPr lang="ko-KR" altLang="en-US" dirty="0"/>
+          </a:p>
+        </p:txBody>
+      </p:sp>
+      <p:pic>
+        <p:nvPicPr>
+          <p:cNvPr id="6" name="그림 5"/>
+          <p:cNvPicPr>
+            <a:picLocks noChangeAspect="1"/>
+          </p:cNvPicPr>
+          <p:nvPr/>
+        </p:nvPicPr>
+        <p:blipFill>
+          <a:blip r:embed="rId3"/>
+          <a:stretch>
+            <a:fillRect/>
+          </a:stretch>
+        </p:blipFill>
+        <p:spPr>
+          <a:xfrm>
+            <a:off x="614366" y="3306742"/>
+            <a:ext cx="4248743" cy="295316"/>
+          </a:xfrm>
+          <a:prstGeom prst="rect">
+            <a:avLst/>
+          </a:prstGeom>
+        </p:spPr>
+      </p:pic>
+      <p:sp>
+        <p:nvSpPr>
+          <p:cNvPr id="7" name="TextBox 6"/>
+          <p:cNvSpPr txBox="1"/>
+          <p:nvPr/>
+        </p:nvSpPr>
+        <p:spPr>
+          <a:xfrm>
+            <a:off x="6668348" y="3001893"/>
+            <a:ext cx="4279052" cy="1477328"/>
+          </a:xfrm>
+          <a:prstGeom prst="rect">
+            <a:avLst/>
+          </a:prstGeom>
+          <a:noFill/>
+        </p:spPr>
+        <p:txBody>
+          <a:bodyPr wrap="square" rtlCol="0">
+            <a:spAutoFit/>
+          </a:bodyPr>
+          <a:lstStyle/>
+          <a:p>
+            <a:r>
+              <a:rPr lang="ko-KR" altLang="en-US" dirty="0" smtClean="0"/>
+              <a:t>해결</a:t>
+            </a:r>
+            <a:endParaRPr lang="en-US" altLang="ko-KR" dirty="0" smtClean="0"/>
+          </a:p>
+          <a:p>
+            <a:r>
+              <a:rPr lang="en-US" altLang="ko-KR" dirty="0" smtClean="0"/>
+              <a:t>Action</a:t>
+            </a:r>
+            <a:r>
+              <a:rPr lang="ko-KR" altLang="en-US" dirty="0" smtClean="0"/>
+              <a:t>에서 </a:t>
+            </a:r>
+            <a:r>
+              <a:rPr lang="en-US" altLang="ko-KR" dirty="0" smtClean="0"/>
+              <a:t>id</a:t>
+            </a:r>
+            <a:r>
+              <a:rPr lang="ko-KR" altLang="en-US" dirty="0" smtClean="0"/>
+              <a:t>를 보내고</a:t>
+            </a:r>
+            <a:endParaRPr lang="en-US" altLang="ko-KR" dirty="0"/>
+          </a:p>
+          <a:p>
+            <a:endParaRPr lang="en-US" altLang="ko-KR" dirty="0" smtClean="0"/>
+          </a:p>
+          <a:p>
+            <a:r>
+              <a:rPr lang="en-US" altLang="ko-KR" dirty="0" smtClean="0"/>
+              <a:t>Controller</a:t>
+            </a:r>
+            <a:r>
+              <a:rPr lang="ko-KR" altLang="en-US" dirty="0" smtClean="0"/>
+              <a:t>에서 </a:t>
+            </a:r>
+            <a:r>
+              <a:rPr lang="en-US" altLang="ko-KR" dirty="0" smtClean="0"/>
+              <a:t>id</a:t>
+            </a:r>
+            <a:r>
+              <a:rPr lang="ko-KR" altLang="en-US" dirty="0" smtClean="0"/>
+              <a:t>의 값을 직접 변경을 해줌</a:t>
+            </a:r>
+            <a:r>
+              <a:rPr lang="en-US" altLang="ko-KR" dirty="0" smtClean="0"/>
+              <a:t>!</a:t>
+            </a:r>
+            <a:endParaRPr lang="ko-KR" altLang="en-US" dirty="0"/>
+          </a:p>
+        </p:txBody>
+      </p:sp>
+      <p:pic>
+        <p:nvPicPr>
+          <p:cNvPr id="8" name="그림 7"/>
+          <p:cNvPicPr>
+            <a:picLocks noChangeAspect="1"/>
+          </p:cNvPicPr>
+          <p:nvPr/>
+        </p:nvPicPr>
+        <p:blipFill>
+          <a:blip r:embed="rId4"/>
+          <a:stretch>
+            <a:fillRect/>
+          </a:stretch>
+        </p:blipFill>
+        <p:spPr>
+          <a:xfrm>
+            <a:off x="254656" y="3892409"/>
+            <a:ext cx="5772956" cy="2019582"/>
+          </a:xfrm>
+          <a:prstGeom prst="rect">
+            <a:avLst/>
+          </a:prstGeom>
+        </p:spPr>
+      </p:pic>
+    </p:spTree>
+    <p:extLst>
+      <p:ext uri="{BB962C8B-B14F-4D97-AF65-F5344CB8AC3E}">
+        <p14:creationId xmlns:p14="http://schemas.microsoft.com/office/powerpoint/2010/main" val="4095045662"/>
+      </p:ext>
+    </p:extLst>
+  </p:cSld>
+  <p:clrMapOvr>
+    <a:masterClrMapping/>
+  </p:clrMapOvr>
+</p:sld>
+</file>
+
+<file path=ppt/slides/slide3.xml><?xml version="1.0" encoding="utf-8"?>
+<p:sld xmlns:a="http://schemas.openxmlformats.org/drawingml/2006/main" xmlns:r="http://schemas.openxmlformats.org/officeDocument/2006/relationships" xmlns:p="http://schemas.openxmlformats.org/presentationml/2006/main">
+  <p:cSld>
+    <p:spTree>
+      <p:nvGrpSpPr>
+        <p:cNvPr id="1" name=""/>
+        <p:cNvGrpSpPr/>
+        <p:nvPr/>
+      </p:nvGrpSpPr>
+      <p:grpSpPr>
+        <a:xfrm>
+          <a:off x="0" y="0"/>
+          <a:ext cx="0" cy="0"/>
+          <a:chOff x="0" y="0"/>
+          <a:chExt cx="0" cy="0"/>
+        </a:xfrm>
+      </p:grpSpPr>
+      <p:sp>
+        <p:nvSpPr>
+          <p:cNvPr id="5" name="TextBox 4"/>
+          <p:cNvSpPr txBox="1"/>
+          <p:nvPr/>
+        </p:nvSpPr>
+        <p:spPr>
+          <a:xfrm>
+            <a:off x="6748330" y="1553865"/>
+            <a:ext cx="4055919" cy="1200329"/>
+          </a:xfrm>
+          <a:prstGeom prst="rect">
+            <a:avLst/>
+          </a:prstGeom>
+          <a:noFill/>
+        </p:spPr>
+        <p:txBody>
+          <a:bodyPr wrap="none" rtlCol="0">
+            <a:spAutoFit/>
+          </a:bodyPr>
+          <a:lstStyle/>
+          <a:p>
+            <a:r>
+              <a:rPr lang="ko-KR" altLang="en-US" dirty="0" smtClean="0"/>
+              <a:t>문제</a:t>
+            </a:r>
+            <a:endParaRPr lang="en-US" altLang="ko-KR" dirty="0" smtClean="0"/>
+          </a:p>
+          <a:p>
+            <a:r>
+              <a:rPr lang="ko-KR" altLang="en-US" dirty="0" smtClean="0"/>
+              <a:t>에러 메시지</a:t>
+            </a:r>
+            <a:r>
+              <a:rPr lang="en-US" altLang="ko-KR" dirty="0"/>
+              <a:t> </a:t>
+            </a:r>
+            <a:r>
+              <a:rPr lang="ko-KR" altLang="en-US" dirty="0" smtClean="0"/>
+              <a:t>출력할 때 날짜를 클릭 </a:t>
+            </a:r>
+            <a:endParaRPr lang="en-US" altLang="ko-KR" dirty="0" smtClean="0"/>
+          </a:p>
+          <a:p>
+            <a:r>
+              <a:rPr lang="ko-KR" altLang="en-US" dirty="0" smtClean="0"/>
+              <a:t>안하고 클릭할 시 </a:t>
+            </a:r>
+            <a:r>
+              <a:rPr lang="ko-KR" altLang="en-US" dirty="0" err="1" smtClean="0"/>
+              <a:t>디비에</a:t>
+            </a:r>
+            <a:r>
+              <a:rPr lang="ko-KR" altLang="en-US" dirty="0" smtClean="0"/>
+              <a:t> 바로 넘어감</a:t>
+            </a:r>
+            <a:endParaRPr lang="en-US" altLang="ko-KR" dirty="0" smtClean="0"/>
+          </a:p>
+          <a:p>
+            <a:endParaRPr lang="en-US" altLang="ko-KR" dirty="0"/>
+          </a:p>
+        </p:txBody>
+      </p:sp>
+      <p:pic>
+        <p:nvPicPr>
+          <p:cNvPr id="6" name="그림 5"/>
+          <p:cNvPicPr>
+            <a:picLocks noChangeAspect="1"/>
+          </p:cNvPicPr>
+          <p:nvPr/>
+        </p:nvPicPr>
+        <p:blipFill>
+          <a:blip r:embed="rId2"/>
+          <a:stretch>
+            <a:fillRect/>
+          </a:stretch>
+        </p:blipFill>
+        <p:spPr>
+          <a:xfrm>
+            <a:off x="315903" y="2289369"/>
+            <a:ext cx="5890164" cy="1330741"/>
+          </a:xfrm>
+          <a:prstGeom prst="rect">
+            <a:avLst/>
+          </a:prstGeom>
+        </p:spPr>
+      </p:pic>
+      <p:sp>
+        <p:nvSpPr>
+          <p:cNvPr id="7" name="직사각형 6"/>
+          <p:cNvSpPr/>
+          <p:nvPr/>
+        </p:nvSpPr>
+        <p:spPr>
+          <a:xfrm>
+            <a:off x="6671734" y="4067370"/>
+            <a:ext cx="6096000" cy="1754326"/>
+          </a:xfrm>
+          <a:prstGeom prst="rect">
+            <a:avLst/>
+          </a:prstGeom>
+        </p:spPr>
         <p:txBody>
           <a:bodyPr>
             <a:spAutoFit/>
@@ -2986,223 +3376,538 @@
           <a:lstStyle/>
           <a:p>
             <a:r>
+              <a:rPr lang="ko-KR" altLang="en-US" dirty="0"/>
+              <a:t>해결</a:t>
+            </a:r>
+            <a:endParaRPr lang="en-US" altLang="ko-KR" dirty="0"/>
+          </a:p>
+          <a:p>
+            <a:r>
+              <a:rPr lang="ko-KR" altLang="en-US" dirty="0" err="1"/>
+              <a:t>디비에</a:t>
+            </a:r>
+            <a:r>
+              <a:rPr lang="ko-KR" altLang="en-US" dirty="0"/>
+              <a:t> </a:t>
+            </a:r>
+            <a:r>
+              <a:rPr lang="en-US" altLang="ko-KR" dirty="0"/>
+              <a:t>“DATE”</a:t>
+            </a:r>
+            <a:r>
+              <a:rPr lang="ko-KR" altLang="en-US" dirty="0"/>
+              <a:t>컬럼에 </a:t>
+            </a:r>
+            <a:r>
+              <a:rPr lang="en-US" altLang="ko-KR" dirty="0"/>
+              <a:t>not null </a:t>
+            </a:r>
+            <a:r>
+              <a:rPr lang="ko-KR" altLang="en-US" dirty="0"/>
+              <a:t>추가와</a:t>
+            </a:r>
+            <a:endParaRPr lang="en-US" altLang="ko-KR" dirty="0"/>
+          </a:p>
+          <a:p>
+            <a:r>
+              <a:rPr lang="ko-KR" altLang="en-US" dirty="0"/>
+              <a:t>눌렀을 때 컨트롤러에서 </a:t>
+            </a:r>
+            <a:r>
+              <a:rPr lang="en-US" altLang="ko-KR" dirty="0"/>
+              <a:t>if</a:t>
+            </a:r>
+            <a:r>
+              <a:rPr lang="ko-KR" altLang="en-US" dirty="0"/>
+              <a:t>문을 추가해 </a:t>
+            </a:r>
+            <a:r>
+              <a:rPr lang="en-US" altLang="ko-KR" dirty="0"/>
+              <a:t>Date</a:t>
+            </a:r>
+            <a:r>
+              <a:rPr lang="ko-KR" altLang="en-US" dirty="0"/>
+              <a:t>에</a:t>
+            </a:r>
+            <a:endParaRPr lang="en-US" altLang="ko-KR" dirty="0"/>
+          </a:p>
+          <a:p>
+            <a:r>
+              <a:rPr lang="ko-KR" altLang="en-US" dirty="0"/>
+              <a:t>값을 비교하여 </a:t>
+            </a:r>
+            <a:r>
+              <a:rPr lang="en-US" altLang="ko-KR" dirty="0"/>
+              <a:t>null</a:t>
+            </a:r>
+            <a:r>
+              <a:rPr lang="ko-KR" altLang="en-US" dirty="0"/>
+              <a:t>일 경우 해당 </a:t>
+            </a:r>
+            <a:r>
+              <a:rPr lang="ko-KR" altLang="en-US" dirty="0" err="1"/>
+              <a:t>에러메세지</a:t>
+            </a:r>
+            <a:r>
+              <a:rPr lang="ko-KR" altLang="en-US" dirty="0"/>
+              <a:t> 출력</a:t>
+            </a:r>
+            <a:endParaRPr lang="en-US" altLang="ko-KR" dirty="0"/>
+          </a:p>
+          <a:p>
+            <a:r>
+              <a:rPr lang="ko-KR" altLang="en-US" dirty="0"/>
+              <a:t>과 함께 </a:t>
+            </a:r>
+            <a:r>
+              <a:rPr lang="en-US" altLang="ko-KR" dirty="0" err="1"/>
+              <a:t>RedirectView</a:t>
+            </a:r>
+            <a:r>
+              <a:rPr lang="ko-KR" altLang="en-US" dirty="0"/>
+              <a:t>를 통해 </a:t>
+            </a:r>
+            <a:r>
+              <a:rPr lang="en-US" altLang="ko-KR" dirty="0" err="1"/>
+              <a:t>reservation_form</a:t>
+            </a:r>
+            <a:r>
+              <a:rPr lang="ko-KR" altLang="en-US" dirty="0"/>
+              <a:t>으로</a:t>
+            </a:r>
+            <a:endParaRPr lang="en-US" altLang="ko-KR" dirty="0"/>
+          </a:p>
+          <a:p>
+            <a:r>
+              <a:rPr lang="ko-KR" altLang="en-US" dirty="0"/>
+              <a:t>보냄</a:t>
+            </a:r>
+            <a:endParaRPr lang="ko-KR" altLang="en-US" dirty="0"/>
+          </a:p>
+        </p:txBody>
+      </p:sp>
+    </p:spTree>
+    <p:extLst>
+      <p:ext uri="{BB962C8B-B14F-4D97-AF65-F5344CB8AC3E}">
+        <p14:creationId xmlns:p14="http://schemas.microsoft.com/office/powerpoint/2010/main" val="1393645191"/>
+      </p:ext>
+    </p:extLst>
+  </p:cSld>
+  <p:clrMapOvr>
+    <a:masterClrMapping/>
+  </p:clrMapOvr>
+</p:sld>
+</file>
+
+<file path=ppt/slides/slide4.xml><?xml version="1.0" encoding="utf-8"?>
+<p:sld xmlns:a="http://schemas.openxmlformats.org/drawingml/2006/main" xmlns:r="http://schemas.openxmlformats.org/officeDocument/2006/relationships" xmlns:p="http://schemas.openxmlformats.org/presentationml/2006/main">
+  <p:cSld>
+    <p:spTree>
+      <p:nvGrpSpPr>
+        <p:cNvPr id="1" name=""/>
+        <p:cNvGrpSpPr/>
+        <p:nvPr/>
+      </p:nvGrpSpPr>
+      <p:grpSpPr>
+        <a:xfrm>
+          <a:off x="0" y="0"/>
+          <a:ext cx="0" cy="0"/>
+          <a:chOff x="0" y="0"/>
+          <a:chExt cx="0" cy="0"/>
+        </a:xfrm>
+      </p:grpSpPr>
+      <p:pic>
+        <p:nvPicPr>
+          <p:cNvPr id="7" name="그림 6"/>
+          <p:cNvPicPr>
+            <a:picLocks noChangeAspect="1"/>
+          </p:cNvPicPr>
+          <p:nvPr/>
+        </p:nvPicPr>
+        <p:blipFill>
+          <a:blip r:embed="rId2"/>
+          <a:stretch>
+            <a:fillRect/>
+          </a:stretch>
+        </p:blipFill>
+        <p:spPr>
+          <a:xfrm>
+            <a:off x="437637" y="336317"/>
+            <a:ext cx="5522896" cy="1974507"/>
+          </a:xfrm>
+          <a:prstGeom prst="rect">
+            <a:avLst/>
+          </a:prstGeom>
+        </p:spPr>
+      </p:pic>
+      <p:sp>
+        <p:nvSpPr>
+          <p:cNvPr id="9" name="TextBox 8"/>
+          <p:cNvSpPr txBox="1"/>
+          <p:nvPr/>
+        </p:nvSpPr>
+        <p:spPr>
+          <a:xfrm>
+            <a:off x="6460067" y="1968533"/>
+            <a:ext cx="5269391" cy="923330"/>
+          </a:xfrm>
+          <a:prstGeom prst="rect">
+            <a:avLst/>
+          </a:prstGeom>
+          <a:noFill/>
+        </p:spPr>
+        <p:txBody>
+          <a:bodyPr wrap="none" rtlCol="0">
+            <a:spAutoFit/>
+          </a:bodyPr>
+          <a:lstStyle/>
+          <a:p>
+            <a:r>
               <a:rPr lang="ko-KR" altLang="en-US" dirty="0" smtClean="0"/>
-              <a:t>문제점</a:t>
-            </a:r>
-          </a:p>
-          <a:p>
+              <a:t>문제</a:t>
+            </a:r>
+            <a:endParaRPr lang="en-US" altLang="ko-KR" dirty="0" smtClean="0"/>
+          </a:p>
+          <a:p>
+            <a:r>
+              <a:rPr lang="en-US" altLang="ko-KR" dirty="0" smtClean="0"/>
+              <a:t>Main </a:t>
+            </a:r>
             <a:r>
               <a:rPr lang="ko-KR" altLang="en-US" dirty="0" smtClean="0"/>
-              <a:t>직접 </a:t>
+              <a:t>페이지에서 예약하기를 </a:t>
             </a:r>
             <a:r>
               <a:rPr lang="ko-KR" altLang="en-US" dirty="0" err="1" smtClean="0"/>
-              <a:t>session.id를</a:t>
+              <a:t>클릭시</a:t>
             </a:r>
             <a:r>
               <a:rPr lang="ko-KR" altLang="en-US" dirty="0" smtClean="0"/>
-              <a:t> </a:t>
-            </a:r>
-            <a:r>
-              <a:rPr lang="ko-KR" altLang="en-US" dirty="0" err="1" smtClean="0"/>
-              <a:t>JavaScript</a:t>
-            </a:r>
+              <a:t> 오류가 발생</a:t>
+            </a:r>
+            <a:endParaRPr lang="en-US" altLang="ko-KR" dirty="0" smtClean="0"/>
+          </a:p>
+          <a:p>
             <a:r>
               <a:rPr lang="ko-KR" altLang="en-US" dirty="0" smtClean="0"/>
-              <a:t> 코드에 삽입하면 </a:t>
-            </a:r>
-            <a:r>
-              <a:rPr lang="ko-KR" altLang="en-US" dirty="0" err="1" smtClean="0"/>
-              <a:t>Thymeleaf</a:t>
+              <a:t>발생 이유는 </a:t>
+            </a:r>
+            <a:r>
+              <a:rPr lang="en-US" altLang="ko-KR" dirty="0" err="1" smtClean="0"/>
+              <a:t>vo</a:t>
             </a:r>
             <a:r>
               <a:rPr lang="ko-KR" altLang="en-US" dirty="0" smtClean="0"/>
-              <a:t> 템플릿이 서버 측에서 </a:t>
-            </a:r>
-            <a:r>
-              <a:rPr lang="ko-KR" altLang="en-US" dirty="0" err="1" smtClean="0"/>
-              <a:t>렌더링되는</a:t>
+              <a:t>에 </a:t>
+            </a:r>
+            <a:r>
+              <a:rPr lang="en-US" altLang="ko-KR" dirty="0" smtClean="0"/>
+              <a:t>null </a:t>
             </a:r>
             <a:r>
               <a:rPr lang="ko-KR" altLang="en-US" dirty="0" smtClean="0"/>
-              <a:t> 동안 </a:t>
-            </a:r>
-            <a:r>
-              <a:rPr lang="ko-KR" altLang="en-US" dirty="0" err="1" smtClean="0"/>
-              <a:t>session.id가</a:t>
-            </a:r>
+              <a:t>이 들어가기 때문</a:t>
+            </a:r>
+            <a:endParaRPr lang="ko-KR" altLang="en-US" dirty="0"/>
+          </a:p>
+        </p:txBody>
+      </p:sp>
+      <p:sp>
+        <p:nvSpPr>
+          <p:cNvPr id="10" name="TextBox 9"/>
+          <p:cNvSpPr txBox="1"/>
+          <p:nvPr/>
+        </p:nvSpPr>
+        <p:spPr>
+          <a:xfrm>
+            <a:off x="6460066" y="3289333"/>
+            <a:ext cx="5789149" cy="923330"/>
+          </a:xfrm>
+          <a:prstGeom prst="rect">
+            <a:avLst/>
+          </a:prstGeom>
+          <a:noFill/>
+        </p:spPr>
+        <p:txBody>
+          <a:bodyPr wrap="none" rtlCol="0">
+            <a:spAutoFit/>
+          </a:bodyPr>
+          <a:lstStyle/>
+          <a:p>
             <a:r>
               <a:rPr lang="ko-KR" altLang="en-US" dirty="0" smtClean="0"/>
-              <a:t> 올바르게 채워지지 않을 수 있습니다.</a:t>
-            </a:r>
-          </a:p>
-          <a:p>
-            <a:endParaRPr lang="ko-KR" altLang="en-US" dirty="0" smtClean="0"/>
-          </a:p>
-          <a:p>
+              <a:t>해결</a:t>
+            </a:r>
+            <a:endParaRPr lang="en-US" altLang="ko-KR" dirty="0" smtClean="0"/>
+          </a:p>
+          <a:p>
+            <a:r>
+              <a:rPr lang="en-US" altLang="ko-KR" dirty="0" smtClean="0"/>
+              <a:t>Vo</a:t>
+            </a:r>
             <a:r>
               <a:rPr lang="ko-KR" altLang="en-US" dirty="0" smtClean="0"/>
-              <a:t>해결책</a:t>
-            </a:r>
-          </a:p>
-          <a:p>
+              <a:t>가 </a:t>
+            </a:r>
+            <a:r>
+              <a:rPr lang="en-US" altLang="ko-KR" dirty="0" smtClean="0"/>
+              <a:t>null</a:t>
+            </a:r>
             <a:r>
               <a:rPr lang="ko-KR" altLang="en-US" dirty="0" smtClean="0"/>
-              <a:t>session.id 값을 </a:t>
-            </a:r>
-            <a:r>
-              <a:rPr lang="ko-KR" altLang="en-US" dirty="0" err="1" smtClean="0"/>
-              <a:t>HTML에</a:t>
-            </a:r>
+              <a:t>일 경우 에러메세지를 추가 후 메인 페이지로</a:t>
+            </a:r>
+            <a:endParaRPr lang="en-US" altLang="ko-KR" dirty="0" smtClean="0"/>
+          </a:p>
+          <a:p>
             <a:r>
               <a:rPr lang="ko-KR" altLang="en-US" dirty="0" smtClean="0"/>
-              <a:t> 삽입한 후, </a:t>
-            </a:r>
-            <a:r>
-              <a:rPr lang="ko-KR" altLang="en-US" dirty="0" err="1" smtClean="0"/>
-              <a:t>JavaScript에서</a:t>
-            </a:r>
-            <a:r>
-              <a:rPr lang="ko-KR" altLang="en-US" dirty="0" smtClean="0"/>
-              <a:t> 이 값을 읽는 방식으로 처리합니다. 이를 통해 서버 측에서 세션 </a:t>
-            </a:r>
-            <a:r>
-              <a:rPr lang="ko-KR" altLang="en-US" dirty="0" err="1" smtClean="0"/>
-              <a:t>ID를</a:t>
-            </a:r>
-            <a:r>
-              <a:rPr lang="ko-KR" altLang="en-US" dirty="0" smtClean="0"/>
-              <a:t> 렌더링하고 클라이언트 측에서 </a:t>
-            </a:r>
-            <a:r>
-              <a:rPr lang="ko-KR" altLang="en-US" dirty="0" err="1" smtClean="0"/>
-              <a:t>JavaScript가</a:t>
-            </a:r>
-            <a:r>
-              <a:rPr lang="ko-KR" altLang="en-US" dirty="0" smtClean="0"/>
-              <a:t> 이를 읽을 수 있도록 합니다.</a:t>
-            </a:r>
-          </a:p>
-          <a:p>
-            <a:endParaRPr lang="ko-KR" altLang="en-US" dirty="0" smtClean="0"/>
-          </a:p>
-          <a:p>
-            <a:r>
-              <a:rPr lang="ko-KR" altLang="en-US" dirty="0" err="1" smtClean="0"/>
-              <a:t>Thymeleaf</a:t>
-            </a:r>
-            <a:r>
-              <a:rPr lang="ko-KR" altLang="en-US" dirty="0" smtClean="0"/>
-              <a:t> 템플릿에서 세션 </a:t>
-            </a:r>
-            <a:r>
-              <a:rPr lang="ko-KR" altLang="en-US" dirty="0" err="1" smtClean="0"/>
-              <a:t>ID를</a:t>
-            </a:r>
-            <a:r>
-              <a:rPr lang="ko-KR" altLang="en-US" dirty="0" smtClean="0"/>
-              <a:t> HTML 요소의 </a:t>
-            </a:r>
-            <a:r>
-              <a:rPr lang="ko-KR" altLang="en-US" dirty="0" err="1" smtClean="0"/>
-              <a:t>data</a:t>
-            </a:r>
-            <a:r>
-              <a:rPr lang="ko-KR" altLang="en-US" dirty="0" smtClean="0"/>
-              <a:t>-* 속성에 저장합니다.</a:t>
-            </a:r>
-          </a:p>
-          <a:p>
-            <a:r>
-              <a:rPr lang="ko-KR" altLang="en-US" dirty="0" err="1" smtClean="0"/>
-              <a:t>JavaScript에서</a:t>
-            </a:r>
-            <a:r>
-              <a:rPr lang="ko-KR" altLang="en-US" dirty="0" smtClean="0"/>
-              <a:t> 이 </a:t>
-            </a:r>
-            <a:r>
-              <a:rPr lang="ko-KR" altLang="en-US" dirty="0" err="1" smtClean="0"/>
-              <a:t>data</a:t>
-            </a:r>
-            <a:r>
-              <a:rPr lang="ko-KR" altLang="en-US" dirty="0" smtClean="0"/>
-              <a:t>-* 속성을 읽어 세션 </a:t>
-            </a:r>
-            <a:r>
-              <a:rPr lang="ko-KR" altLang="en-US" dirty="0" err="1" smtClean="0"/>
-              <a:t>ID를</a:t>
-            </a:r>
-            <a:r>
-              <a:rPr lang="ko-KR" altLang="en-US" dirty="0" smtClean="0"/>
-              <a:t> 사용합니다.</a:t>
-            </a:r>
-          </a:p>
-          <a:p>
-            <a:endParaRPr lang="ko-KR" altLang="en-US" dirty="0" smtClean="0"/>
-          </a:p>
-          <a:p>
-            <a:r>
-              <a:rPr lang="ko-KR" altLang="en-US" dirty="0" smtClean="0"/>
-              <a:t>문제: </a:t>
-            </a:r>
-            <a:r>
-              <a:rPr lang="ko-KR" altLang="en-US" dirty="0" err="1" smtClean="0"/>
-              <a:t>JavaScript가</a:t>
-            </a:r>
-            <a:r>
-              <a:rPr lang="ko-KR" altLang="en-US" dirty="0" smtClean="0"/>
-              <a:t> HTML 요소의 데이터 속성을 직접 읽지 않으면 세션 </a:t>
-            </a:r>
-            <a:r>
-              <a:rPr lang="ko-KR" altLang="en-US" dirty="0" err="1" smtClean="0"/>
-              <a:t>ID를</a:t>
-            </a:r>
-            <a:r>
-              <a:rPr lang="ko-KR" altLang="en-US" dirty="0" smtClean="0"/>
-              <a:t> 사용할 수 없습니다.</a:t>
-            </a:r>
-          </a:p>
-          <a:p>
-            <a:endParaRPr lang="ko-KR" altLang="en-US" dirty="0" smtClean="0"/>
-          </a:p>
-          <a:p>
-            <a:r>
-              <a:rPr lang="ko-KR" altLang="en-US" dirty="0" smtClean="0"/>
-              <a:t>해결: </a:t>
-            </a:r>
-            <a:r>
-              <a:rPr lang="ko-KR" altLang="en-US" dirty="0" err="1" smtClean="0"/>
-              <a:t>data</a:t>
-            </a:r>
-            <a:r>
-              <a:rPr lang="ko-KR" altLang="en-US" dirty="0" smtClean="0"/>
-              <a:t>-* 속성에 저장된 세션 </a:t>
-            </a:r>
-            <a:r>
-              <a:rPr lang="ko-KR" altLang="en-US" dirty="0" err="1" smtClean="0"/>
-              <a:t>ID를</a:t>
-            </a:r>
-            <a:r>
-              <a:rPr lang="ko-KR" altLang="en-US" dirty="0" smtClean="0"/>
-              <a:t> </a:t>
-            </a:r>
-            <a:r>
-              <a:rPr lang="ko-KR" altLang="en-US" dirty="0" err="1" smtClean="0"/>
-              <a:t>JavaScript에서</a:t>
-            </a:r>
-            <a:r>
-              <a:rPr lang="ko-KR" altLang="en-US" dirty="0" smtClean="0"/>
-              <a:t> 읽어서 사용하는 방법을 사용합니다.</a:t>
+              <a:t>이동</a:t>
             </a:r>
             <a:endParaRPr lang="ko-KR" altLang="en-US" dirty="0"/>
           </a:p>
         </p:txBody>
       </p:sp>
+      <p:pic>
+        <p:nvPicPr>
+          <p:cNvPr id="11" name="그림 10"/>
+          <p:cNvPicPr>
+            <a:picLocks noChangeAspect="1"/>
+          </p:cNvPicPr>
+          <p:nvPr/>
+        </p:nvPicPr>
+        <p:blipFill>
+          <a:blip r:embed="rId3"/>
+          <a:stretch>
+            <a:fillRect/>
+          </a:stretch>
+        </p:blipFill>
+        <p:spPr>
+          <a:xfrm>
+            <a:off x="437637" y="2845682"/>
+            <a:ext cx="5522896" cy="2863472"/>
+          </a:xfrm>
+          <a:prstGeom prst="rect">
+            <a:avLst/>
+          </a:prstGeom>
+        </p:spPr>
+      </p:pic>
     </p:spTree>
     <p:extLst>
       <p:ext uri="{BB962C8B-B14F-4D97-AF65-F5344CB8AC3E}">
         <p14:creationId xmlns:p14="http://schemas.microsoft.com/office/powerpoint/2010/main" val="2721563122"/>
+      </p:ext>
+    </p:extLst>
+  </p:cSld>
+  <p:clrMapOvr>
+    <a:masterClrMapping/>
+  </p:clrMapOvr>
+</p:sld>
+</file>
+
+<file path=ppt/slides/slide5.xml><?xml version="1.0" encoding="utf-8"?>
+<p:sld xmlns:a="http://schemas.openxmlformats.org/drawingml/2006/main" xmlns:r="http://schemas.openxmlformats.org/officeDocument/2006/relationships" xmlns:p="http://schemas.openxmlformats.org/presentationml/2006/main">
+  <p:cSld>
+    <p:spTree>
+      <p:nvGrpSpPr>
+        <p:cNvPr id="1" name=""/>
+        <p:cNvGrpSpPr/>
+        <p:nvPr/>
+      </p:nvGrpSpPr>
+      <p:grpSpPr>
+        <a:xfrm>
+          <a:off x="0" y="0"/>
+          <a:ext cx="0" cy="0"/>
+          <a:chOff x="0" y="0"/>
+          <a:chExt cx="0" cy="0"/>
+        </a:xfrm>
+      </p:grpSpPr>
+      <p:pic>
+        <p:nvPicPr>
+          <p:cNvPr id="7" name="그림 6"/>
+          <p:cNvPicPr>
+            <a:picLocks noChangeAspect="1"/>
+          </p:cNvPicPr>
+          <p:nvPr/>
+        </p:nvPicPr>
+        <p:blipFill>
+          <a:blip r:embed="rId2"/>
+          <a:stretch>
+            <a:fillRect/>
+          </a:stretch>
+        </p:blipFill>
+        <p:spPr>
+          <a:xfrm>
+            <a:off x="242379" y="551822"/>
+            <a:ext cx="5870554" cy="1143415"/>
+          </a:xfrm>
+          <a:prstGeom prst="rect">
+            <a:avLst/>
+          </a:prstGeom>
+        </p:spPr>
+      </p:pic>
+      <p:sp>
+        <p:nvSpPr>
+          <p:cNvPr id="8" name="직사각형 7"/>
+          <p:cNvSpPr/>
+          <p:nvPr/>
+        </p:nvSpPr>
+        <p:spPr>
+          <a:xfrm>
+            <a:off x="242379" y="685800"/>
+            <a:ext cx="5709688" cy="135467"/>
+          </a:xfrm>
+          <a:prstGeom prst="rect">
+            <a:avLst/>
+          </a:prstGeom>
+          <a:noFill/>
+          <a:ln>
+            <a:solidFill>
+              <a:schemeClr val="tx1"/>
+            </a:solidFill>
+          </a:ln>
+        </p:spPr>
+        <p:style>
+          <a:lnRef idx="2">
+            <a:schemeClr val="accent1">
+              <a:shade val="50000"/>
+            </a:schemeClr>
+          </a:lnRef>
+          <a:fillRef idx="1">
+            <a:schemeClr val="accent1"/>
+          </a:fillRef>
+          <a:effectRef idx="0">
+            <a:schemeClr val="accent1"/>
+          </a:effectRef>
+          <a:fontRef idx="minor">
+            <a:schemeClr val="lt1"/>
+          </a:fontRef>
+        </p:style>
+        <p:txBody>
+          <a:bodyPr rtlCol="0" anchor="ctr"/>
+          <a:lstStyle/>
+          <a:p>
+            <a:pPr algn="ctr"/>
+            <a:endParaRPr lang="ko-KR" altLang="en-US"/>
+          </a:p>
+        </p:txBody>
+      </p:sp>
+      <p:sp>
+        <p:nvSpPr>
+          <p:cNvPr id="10" name="TextBox 9"/>
+          <p:cNvSpPr txBox="1"/>
+          <p:nvPr/>
+        </p:nvSpPr>
+        <p:spPr>
+          <a:xfrm>
+            <a:off x="6646334" y="568867"/>
+            <a:ext cx="1274708" cy="369332"/>
+          </a:xfrm>
+          <a:prstGeom prst="rect">
+            <a:avLst/>
+          </a:prstGeom>
+          <a:noFill/>
+        </p:spPr>
+        <p:txBody>
+          <a:bodyPr wrap="none" rtlCol="0">
+            <a:spAutoFit/>
+          </a:bodyPr>
+          <a:lstStyle/>
+          <a:p>
+            <a:r>
+              <a:rPr lang="en-US" altLang="ko-KR" dirty="0" smtClean="0"/>
+              <a:t>Input </a:t>
+            </a:r>
+            <a:r>
+              <a:rPr lang="ko-KR" altLang="en-US" dirty="0" smtClean="0"/>
+              <a:t>추가</a:t>
+            </a:r>
+            <a:endParaRPr lang="ko-KR" altLang="en-US" dirty="0"/>
+          </a:p>
+        </p:txBody>
+      </p:sp>
+      <p:pic>
+        <p:nvPicPr>
+          <p:cNvPr id="11" name="그림 10"/>
+          <p:cNvPicPr>
+            <a:picLocks noChangeAspect="1"/>
+          </p:cNvPicPr>
+          <p:nvPr/>
+        </p:nvPicPr>
+        <p:blipFill>
+          <a:blip r:embed="rId3"/>
+          <a:stretch>
+            <a:fillRect/>
+          </a:stretch>
+        </p:blipFill>
+        <p:spPr>
+          <a:xfrm>
+            <a:off x="242379" y="2263201"/>
+            <a:ext cx="4296375" cy="638264"/>
+          </a:xfrm>
+          <a:prstGeom prst="rect">
+            <a:avLst/>
+          </a:prstGeom>
+        </p:spPr>
+      </p:pic>
+      <p:sp>
+        <p:nvSpPr>
+          <p:cNvPr id="12" name="TextBox 11"/>
+          <p:cNvSpPr txBox="1"/>
+          <p:nvPr/>
+        </p:nvSpPr>
+        <p:spPr>
+          <a:xfrm>
+            <a:off x="6646334" y="2078535"/>
+            <a:ext cx="4149662" cy="369332"/>
+          </a:xfrm>
+          <a:prstGeom prst="rect">
+            <a:avLst/>
+          </a:prstGeom>
+          <a:noFill/>
+        </p:spPr>
+        <p:txBody>
+          <a:bodyPr wrap="none" rtlCol="0">
+            <a:spAutoFit/>
+          </a:bodyPr>
+          <a:lstStyle/>
+          <a:p>
+            <a:r>
+              <a:rPr lang="en-US" altLang="ko-KR" dirty="0" smtClean="0"/>
+              <a:t>JS</a:t>
+            </a:r>
+            <a:r>
+              <a:rPr lang="ko-KR" altLang="en-US" dirty="0" smtClean="0"/>
+              <a:t>추가 </a:t>
+            </a:r>
+            <a:r>
+              <a:rPr lang="en-US" altLang="ko-KR" dirty="0" smtClean="0"/>
+              <a:t>error</a:t>
+            </a:r>
+            <a:r>
+              <a:rPr lang="ko-KR" altLang="en-US" dirty="0" smtClean="0"/>
+              <a:t>가 존재할 경우 </a:t>
+            </a:r>
+            <a:r>
+              <a:rPr lang="en-US" altLang="ko-KR" dirty="0" smtClean="0"/>
+              <a:t>alert </a:t>
+            </a:r>
+            <a:r>
+              <a:rPr lang="ko-KR" altLang="en-US" dirty="0" smtClean="0"/>
+              <a:t>실행</a:t>
+            </a:r>
+            <a:r>
+              <a:rPr lang="en-US" altLang="ko-KR" dirty="0" smtClean="0"/>
+              <a:t>!</a:t>
+            </a:r>
+            <a:endParaRPr lang="ko-KR" altLang="en-US" dirty="0"/>
+          </a:p>
+        </p:txBody>
+      </p:sp>
+    </p:spTree>
+    <p:extLst>
+      <p:ext uri="{BB962C8B-B14F-4D97-AF65-F5344CB8AC3E}">
+        <p14:creationId xmlns:p14="http://schemas.microsoft.com/office/powerpoint/2010/main" val="2159965201"/>
       </p:ext>
     </p:extLst>
   </p:cSld>
